--- a/1_Preliminary_problems_neural_network_fundamentals/Wyniki.pptx
+++ b/1_Preliminary_problems_neural_network_fundamentals/Wyniki.pptx
@@ -5,7 +5,17 @@
     <p:sldMasterId id="2147483648" r:id="rId1"/>
   </p:sldMasterIdLst>
   <p:sldIdLst>
-    <p:sldId id="256" r:id="rId2"/>
+    <p:sldId id="263" r:id="rId2"/>
+    <p:sldId id="256" r:id="rId3"/>
+    <p:sldId id="257" r:id="rId4"/>
+    <p:sldId id="258" r:id="rId5"/>
+    <p:sldId id="259" r:id="rId6"/>
+    <p:sldId id="260" r:id="rId7"/>
+    <p:sldId id="261" r:id="rId8"/>
+    <p:sldId id="262" r:id="rId9"/>
+    <p:sldId id="264" r:id="rId10"/>
+    <p:sldId id="265" r:id="rId11"/>
+    <p:sldId id="266" r:id="rId12"/>
   </p:sldIdLst>
   <p:sldSz cx="12192000" cy="6858000"/>
   <p:notesSz cx="6858000" cy="9144000"/>
@@ -104,6 +114,11 @@
       </a:defRPr>
     </a:lvl9pPr>
   </p:defaultTextStyle>
+  <p:extLst>
+    <p:ext uri="{EFAFB233-063F-42B5-8137-9DF3F51BA10A}">
+      <p15:sldGuideLst xmlns:p15="http://schemas.microsoft.com/office/powerpoint/2012/main"/>
+    </p:ext>
+  </p:extLst>
 </p:presentation>
 </file>
 
@@ -256,7 +271,7 @@
           <a:p>
             <a:fld id="{E141258C-35D2-4754-A398-27E3BF1CF70A}" type="datetimeFigureOut">
               <a:rPr lang="en-US" smtClean="0"/>
-              <a:t>10/3/2026</a:t>
+              <a:t>10/15/2026</a:t>
             </a:fld>
             <a:endParaRPr lang="en-US"/>
           </a:p>
@@ -456,7 +471,7 @@
           <a:p>
             <a:fld id="{E141258C-35D2-4754-A398-27E3BF1CF70A}" type="datetimeFigureOut">
               <a:rPr lang="en-US" smtClean="0"/>
-              <a:t>10/3/2026</a:t>
+              <a:t>10/15/2026</a:t>
             </a:fld>
             <a:endParaRPr lang="en-US"/>
           </a:p>
@@ -666,7 +681,7 @@
           <a:p>
             <a:fld id="{E141258C-35D2-4754-A398-27E3BF1CF70A}" type="datetimeFigureOut">
               <a:rPr lang="en-US" smtClean="0"/>
-              <a:t>10/3/2026</a:t>
+              <a:t>10/15/2026</a:t>
             </a:fld>
             <a:endParaRPr lang="en-US"/>
           </a:p>
@@ -866,7 +881,7 @@
           <a:p>
             <a:fld id="{E141258C-35D2-4754-A398-27E3BF1CF70A}" type="datetimeFigureOut">
               <a:rPr lang="en-US" smtClean="0"/>
-              <a:t>10/3/2026</a:t>
+              <a:t>10/15/2026</a:t>
             </a:fld>
             <a:endParaRPr lang="en-US"/>
           </a:p>
@@ -1142,7 +1157,7 @@
           <a:p>
             <a:fld id="{E141258C-35D2-4754-A398-27E3BF1CF70A}" type="datetimeFigureOut">
               <a:rPr lang="en-US" smtClean="0"/>
-              <a:t>10/3/2026</a:t>
+              <a:t>10/15/2026</a:t>
             </a:fld>
             <a:endParaRPr lang="en-US"/>
           </a:p>
@@ -1410,7 +1425,7 @@
           <a:p>
             <a:fld id="{E141258C-35D2-4754-A398-27E3BF1CF70A}" type="datetimeFigureOut">
               <a:rPr lang="en-US" smtClean="0"/>
-              <a:t>10/3/2026</a:t>
+              <a:t>10/15/2026</a:t>
             </a:fld>
             <a:endParaRPr lang="en-US"/>
           </a:p>
@@ -1825,7 +1840,7 @@
           <a:p>
             <a:fld id="{E141258C-35D2-4754-A398-27E3BF1CF70A}" type="datetimeFigureOut">
               <a:rPr lang="en-US" smtClean="0"/>
-              <a:t>10/3/2026</a:t>
+              <a:t>10/15/2026</a:t>
             </a:fld>
             <a:endParaRPr lang="en-US"/>
           </a:p>
@@ -1967,7 +1982,7 @@
           <a:p>
             <a:fld id="{E141258C-35D2-4754-A398-27E3BF1CF70A}" type="datetimeFigureOut">
               <a:rPr lang="en-US" smtClean="0"/>
-              <a:t>10/3/2026</a:t>
+              <a:t>10/15/2026</a:t>
             </a:fld>
             <a:endParaRPr lang="en-US"/>
           </a:p>
@@ -2080,7 +2095,7 @@
           <a:p>
             <a:fld id="{E141258C-35D2-4754-A398-27E3BF1CF70A}" type="datetimeFigureOut">
               <a:rPr lang="en-US" smtClean="0"/>
-              <a:t>10/3/2026</a:t>
+              <a:t>10/15/2026</a:t>
             </a:fld>
             <a:endParaRPr lang="en-US"/>
           </a:p>
@@ -2393,7 +2408,7 @@
           <a:p>
             <a:fld id="{E141258C-35D2-4754-A398-27E3BF1CF70A}" type="datetimeFigureOut">
               <a:rPr lang="en-US" smtClean="0"/>
-              <a:t>10/3/2026</a:t>
+              <a:t>10/15/2026</a:t>
             </a:fld>
             <a:endParaRPr lang="en-US"/>
           </a:p>
@@ -2682,7 +2697,7 @@
           <a:p>
             <a:fld id="{E141258C-35D2-4754-A398-27E3BF1CF70A}" type="datetimeFigureOut">
               <a:rPr lang="en-US" smtClean="0"/>
-              <a:t>10/3/2026</a:t>
+              <a:t>10/15/2026</a:t>
             </a:fld>
             <a:endParaRPr lang="en-US"/>
           </a:p>
@@ -2925,7 +2940,7 @@
           <a:p>
             <a:fld id="{E141258C-35D2-4754-A398-27E3BF1CF70A}" type="datetimeFigureOut">
               <a:rPr lang="en-US" smtClean="0"/>
-              <a:t>10/3/2026</a:t>
+              <a:t>10/15/2026</a:t>
             </a:fld>
             <a:endParaRPr lang="en-US"/>
           </a:p>
@@ -3330,6 +3345,108 @@
   <p:cSld>
     <p:spTree>
       <p:nvGrpSpPr>
+        <p:cNvPr id="1" name="">
+          <a:extLst>
+            <a:ext uri="{FF2B5EF4-FFF2-40B4-BE49-F238E27FC236}">
+              <a16:creationId xmlns:a16="http://schemas.microsoft.com/office/drawing/2014/main" id="{720207E3-6DE2-5E3B-C39C-3AB937DFBA66}"/>
+            </a:ext>
+          </a:extLst>
+        </p:cNvPr>
+        <p:cNvGrpSpPr/>
+        <p:nvPr/>
+      </p:nvGrpSpPr>
+      <p:grpSpPr>
+        <a:xfrm>
+          <a:off x="0" y="0"/>
+          <a:ext cx="0" cy="0"/>
+          <a:chOff x="0" y="0"/>
+          <a:chExt cx="0" cy="0"/>
+        </a:xfrm>
+      </p:grpSpPr>
+      <p:sp>
+        <p:nvSpPr>
+          <p:cNvPr id="2" name="Tytuł 1">
+            <a:extLst>
+              <a:ext uri="{FF2B5EF4-FFF2-40B4-BE49-F238E27FC236}">
+                <a16:creationId xmlns:a16="http://schemas.microsoft.com/office/drawing/2014/main" id="{8228E790-6BA6-68C4-806D-ABEFFBFCF033}"/>
+              </a:ext>
+            </a:extLst>
+          </p:cNvPr>
+          <p:cNvSpPr>
+            <a:spLocks noGrp="1"/>
+          </p:cNvSpPr>
+          <p:nvPr>
+            <p:ph type="ctrTitle"/>
+          </p:nvPr>
+        </p:nvSpPr>
+        <p:spPr/>
+        <p:txBody>
+          <a:bodyPr>
+            <a:normAutofit fontScale="90000"/>
+          </a:bodyPr>
+          <a:lstStyle/>
+          <a:p>
+            <a:br>
+              <a:rPr lang="pl-PL" dirty="0"/>
+            </a:br>
+            <a:r>
+              <a:rPr lang="pl-PL" dirty="0"/>
+              <a:t>Ex0</a:t>
+            </a:r>
+            <a:br>
+              <a:rPr lang="pl-PL" dirty="0"/>
+            </a:br>
+            <a:r>
+              <a:rPr lang="pl-PL" dirty="0"/>
+              <a:t>XOR</a:t>
+            </a:r>
+            <a:endParaRPr lang="en-US" dirty="0"/>
+          </a:p>
+        </p:txBody>
+      </p:sp>
+      <p:sp>
+        <p:nvSpPr>
+          <p:cNvPr id="3" name="Podtytuł 2">
+            <a:extLst>
+              <a:ext uri="{FF2B5EF4-FFF2-40B4-BE49-F238E27FC236}">
+                <a16:creationId xmlns:a16="http://schemas.microsoft.com/office/drawing/2014/main" id="{EC5E4A92-F6A8-FB25-9F2B-591A13605F86}"/>
+              </a:ext>
+            </a:extLst>
+          </p:cNvPr>
+          <p:cNvSpPr>
+            <a:spLocks noGrp="1"/>
+          </p:cNvSpPr>
+          <p:nvPr>
+            <p:ph type="subTitle" idx="1"/>
+          </p:nvPr>
+        </p:nvSpPr>
+        <p:spPr/>
+        <p:txBody>
+          <a:bodyPr/>
+          <a:lstStyle/>
+          <a:p>
+            <a:endParaRPr lang="en-US"/>
+          </a:p>
+        </p:txBody>
+      </p:sp>
+    </p:spTree>
+    <p:extLst>
+      <p:ext uri="{BB962C8B-B14F-4D97-AF65-F5344CB8AC3E}">
+        <p14:creationId xmlns:p14="http://schemas.microsoft.com/office/powerpoint/2010/main" val="2779640797"/>
+      </p:ext>
+    </p:extLst>
+  </p:cSld>
+  <p:clrMapOvr>
+    <a:masterClrMapping/>
+  </p:clrMapOvr>
+</p:sld>
+</file>
+
+<file path=ppt/slides/slide10.xml><?xml version="1.0" encoding="utf-8"?>
+<p:sld xmlns:a="http://schemas.openxmlformats.org/drawingml/2006/main" xmlns:r="http://schemas.openxmlformats.org/officeDocument/2006/relationships" xmlns:p="http://schemas.openxmlformats.org/presentationml/2006/main">
+  <p:cSld>
+    <p:spTree>
+      <p:nvGrpSpPr>
         <p:cNvPr id="1" name=""/>
         <p:cNvGrpSpPr/>
         <p:nvPr/>
@@ -3347,6 +3464,483 @@
           <p:cNvPr id="2" name="Tytuł 1">
             <a:extLst>
               <a:ext uri="{FF2B5EF4-FFF2-40B4-BE49-F238E27FC236}">
+                <a16:creationId xmlns:a16="http://schemas.microsoft.com/office/drawing/2014/main" id="{32A16FE3-0F12-F1B0-C6A4-5E695264454E}"/>
+              </a:ext>
+            </a:extLst>
+          </p:cNvPr>
+          <p:cNvSpPr>
+            <a:spLocks noGrp="1"/>
+          </p:cNvSpPr>
+          <p:nvPr>
+            <p:ph type="title"/>
+          </p:nvPr>
+        </p:nvSpPr>
+        <p:spPr/>
+        <p:txBody>
+          <a:bodyPr/>
+          <a:lstStyle/>
+          <a:p>
+            <a:r>
+              <a:rPr lang="pl-PL" dirty="0" err="1"/>
+              <a:t>Parameter</a:t>
+            </a:r>
+            <a:r>
+              <a:rPr lang="pl-PL" dirty="0"/>
+              <a:t> </a:t>
+            </a:r>
+            <a:r>
+              <a:rPr lang="pl-PL" dirty="0" err="1"/>
+              <a:t>count</a:t>
+            </a:r>
+            <a:endParaRPr lang="en-US" dirty="0"/>
+          </a:p>
+        </p:txBody>
+      </p:sp>
+      <p:sp>
+        <p:nvSpPr>
+          <p:cNvPr id="3" name="Symbol zastępczy zawartości 2">
+            <a:extLst>
+              <a:ext uri="{FF2B5EF4-FFF2-40B4-BE49-F238E27FC236}">
+                <a16:creationId xmlns:a16="http://schemas.microsoft.com/office/drawing/2014/main" id="{1EF6AB54-5CD2-D91B-357A-08ADB2C83C79}"/>
+              </a:ext>
+            </a:extLst>
+          </p:cNvPr>
+          <p:cNvSpPr>
+            <a:spLocks noGrp="1"/>
+          </p:cNvSpPr>
+          <p:nvPr>
+            <p:ph idx="1"/>
+          </p:nvPr>
+        </p:nvSpPr>
+        <p:spPr/>
+        <p:txBody>
+          <a:bodyPr>
+            <a:normAutofit lnSpcReduction="10000"/>
+          </a:bodyPr>
+          <a:lstStyle/>
+          <a:p>
+            <a:r>
+              <a:rPr lang="pl-PL" dirty="0" err="1"/>
+              <a:t>Shallow</a:t>
+            </a:r>
+            <a:r>
+              <a:rPr lang="pl-PL" dirty="0"/>
+              <a:t> network </a:t>
+            </a:r>
+            <a:r>
+              <a:rPr lang="pl-PL" dirty="0" err="1"/>
+              <a:t>params</a:t>
+            </a:r>
+            <a:r>
+              <a:rPr lang="pl-PL" dirty="0"/>
+              <a:t>: (2w)+(w+1)</a:t>
+            </a:r>
+          </a:p>
+          <a:p>
+            <a:r>
+              <a:rPr lang="pl-PL" dirty="0" err="1"/>
+              <a:t>Deep</a:t>
+            </a:r>
+            <a:r>
+              <a:rPr lang="pl-PL" dirty="0"/>
+              <a:t> network </a:t>
+            </a:r>
+            <a:r>
+              <a:rPr lang="pl-PL" dirty="0" err="1"/>
+              <a:t>params</a:t>
+            </a:r>
+            <a:r>
+              <a:rPr lang="pl-PL" dirty="0"/>
+              <a:t>: (2w)+(w+1)*w+(w+1)*w+w+1</a:t>
+            </a:r>
+          </a:p>
+          <a:p>
+            <a:endParaRPr lang="pl-PL" dirty="0"/>
+          </a:p>
+          <a:p>
+            <a:r>
+              <a:rPr lang="pl-PL" dirty="0"/>
+              <a:t>w=4 -&gt; </a:t>
+            </a:r>
+            <a:r>
+              <a:rPr lang="pl-PL" dirty="0" err="1"/>
+              <a:t>Shallow</a:t>
+            </a:r>
+            <a:r>
+              <a:rPr lang="pl-PL" dirty="0"/>
+              <a:t> </a:t>
+            </a:r>
+            <a:r>
+              <a:rPr lang="pl-PL" dirty="0" err="1"/>
+              <a:t>params</a:t>
+            </a:r>
+            <a:r>
+              <a:rPr lang="pl-PL" dirty="0"/>
+              <a:t>: 13, </a:t>
+            </a:r>
+            <a:r>
+              <a:rPr lang="pl-PL" dirty="0" err="1"/>
+              <a:t>Deep</a:t>
+            </a:r>
+            <a:r>
+              <a:rPr lang="pl-PL" dirty="0"/>
+              <a:t> </a:t>
+            </a:r>
+            <a:r>
+              <a:rPr lang="pl-PL" dirty="0" err="1"/>
+              <a:t>params</a:t>
+            </a:r>
+            <a:r>
+              <a:rPr lang="pl-PL" dirty="0"/>
+              <a:t>: 53</a:t>
+            </a:r>
+          </a:p>
+          <a:p>
+            <a:endParaRPr lang="pl-PL" dirty="0"/>
+          </a:p>
+          <a:p>
+            <a:pPr marL="0" indent="0">
+              <a:buNone/>
+            </a:pPr>
+            <a:r>
+              <a:rPr lang="en-US" dirty="0" err="1"/>
+              <a:t>shallow_widths</a:t>
+            </a:r>
+            <a:r>
+              <a:rPr lang="en-US" dirty="0"/>
+              <a:t> = [4, 8, 16, 32, 64, 128]</a:t>
+            </a:r>
+            <a:br>
+              <a:rPr lang="pl-PL" dirty="0"/>
+            </a:br>
+            <a:r>
+              <a:rPr lang="en-US" dirty="0" err="1"/>
+              <a:t>deep_widths</a:t>
+            </a:r>
+            <a:r>
+              <a:rPr lang="en-US" dirty="0"/>
+              <a:t> = [1, 2, 4, 6, 9, 12]</a:t>
+            </a:r>
+            <a:endParaRPr lang="pl-PL" dirty="0"/>
+          </a:p>
+          <a:p>
+            <a:pPr marL="0" indent="0" latinLnBrk="1">
+              <a:buNone/>
+            </a:pPr>
+            <a:r>
+              <a:rPr lang="en-US" dirty="0"/>
+              <a:t>shallow_</a:t>
+            </a:r>
+            <a:r>
+              <a:rPr lang="pl-PL" dirty="0" err="1"/>
+              <a:t>params</a:t>
+            </a:r>
+            <a:r>
+              <a:rPr lang="pl-PL" dirty="0"/>
+              <a:t> = [ 13  25  49  97 193 385]</a:t>
+            </a:r>
+          </a:p>
+          <a:p>
+            <a:pPr marL="0" indent="0" latinLnBrk="1">
+              <a:buNone/>
+            </a:pPr>
+            <a:r>
+              <a:rPr lang="pl-PL" dirty="0" err="1"/>
+              <a:t>deep</a:t>
+            </a:r>
+            <a:r>
+              <a:rPr lang="en-US" dirty="0"/>
+              <a:t>_</a:t>
+            </a:r>
+            <a:r>
+              <a:rPr lang="pl-PL" dirty="0" err="1"/>
+              <a:t>params</a:t>
+            </a:r>
+            <a:r>
+              <a:rPr lang="pl-PL" dirty="0"/>
+              <a:t> =[  8  19  53 103 208 349]</a:t>
+            </a:r>
+          </a:p>
+          <a:p>
+            <a:pPr marL="0" indent="0">
+              <a:buNone/>
+            </a:pPr>
+            <a:endParaRPr lang="en-US" dirty="0"/>
+          </a:p>
+        </p:txBody>
+      </p:sp>
+    </p:spTree>
+    <p:extLst>
+      <p:ext uri="{BB962C8B-B14F-4D97-AF65-F5344CB8AC3E}">
+        <p14:creationId xmlns:p14="http://schemas.microsoft.com/office/powerpoint/2010/main" val="1575561552"/>
+      </p:ext>
+    </p:extLst>
+  </p:cSld>
+  <p:clrMapOvr>
+    <a:masterClrMapping/>
+  </p:clrMapOvr>
+</p:sld>
+</file>
+
+<file path=ppt/slides/slide11.xml><?xml version="1.0" encoding="utf-8"?>
+<p:sld xmlns:a="http://schemas.openxmlformats.org/drawingml/2006/main" xmlns:r="http://schemas.openxmlformats.org/officeDocument/2006/relationships" xmlns:p="http://schemas.openxmlformats.org/presentationml/2006/main">
+  <p:cSld>
+    <p:spTree>
+      <p:nvGrpSpPr>
+        <p:cNvPr id="1" name="">
+          <a:extLst>
+            <a:ext uri="{FF2B5EF4-FFF2-40B4-BE49-F238E27FC236}">
+              <a16:creationId xmlns:a16="http://schemas.microsoft.com/office/drawing/2014/main" id="{78727D03-AE47-5D18-B81F-68EE1E2870D8}"/>
+            </a:ext>
+          </a:extLst>
+        </p:cNvPr>
+        <p:cNvGrpSpPr/>
+        <p:nvPr/>
+      </p:nvGrpSpPr>
+      <p:grpSpPr>
+        <a:xfrm>
+          <a:off x="0" y="0"/>
+          <a:ext cx="0" cy="0"/>
+          <a:chOff x="0" y="0"/>
+          <a:chExt cx="0" cy="0"/>
+        </a:xfrm>
+      </p:grpSpPr>
+      <p:sp>
+        <p:nvSpPr>
+          <p:cNvPr id="2" name="Tytuł 1">
+            <a:extLst>
+              <a:ext uri="{FF2B5EF4-FFF2-40B4-BE49-F238E27FC236}">
+                <a16:creationId xmlns:a16="http://schemas.microsoft.com/office/drawing/2014/main" id="{12DC0035-F2A2-955D-1633-61C1C0D40BDA}"/>
+              </a:ext>
+            </a:extLst>
+          </p:cNvPr>
+          <p:cNvSpPr>
+            <a:spLocks noGrp="1"/>
+          </p:cNvSpPr>
+          <p:nvPr>
+            <p:ph type="title"/>
+          </p:nvPr>
+        </p:nvSpPr>
+        <p:spPr/>
+        <p:txBody>
+          <a:bodyPr/>
+          <a:lstStyle/>
+          <a:p>
+            <a:r>
+              <a:rPr lang="pl-PL" dirty="0" err="1"/>
+              <a:t>Results</a:t>
+            </a:r>
+            <a:endParaRPr lang="en-US" dirty="0"/>
+          </a:p>
+        </p:txBody>
+      </p:sp>
+      <p:pic>
+        <p:nvPicPr>
+          <p:cNvPr id="7" name="Obraz 6">
+            <a:extLst>
+              <a:ext uri="{FF2B5EF4-FFF2-40B4-BE49-F238E27FC236}">
+                <a16:creationId xmlns:a16="http://schemas.microsoft.com/office/drawing/2014/main" id="{DD9E3B9F-3B2B-C2E6-B3EA-F1E6130B2270}"/>
+              </a:ext>
+            </a:extLst>
+          </p:cNvPr>
+          <p:cNvPicPr>
+            <a:picLocks noChangeAspect="1"/>
+          </p:cNvPicPr>
+          <p:nvPr/>
+        </p:nvPicPr>
+        <p:blipFill>
+          <a:blip r:embed="rId2"/>
+          <a:stretch>
+            <a:fillRect/>
+          </a:stretch>
+        </p:blipFill>
+        <p:spPr>
+          <a:xfrm>
+            <a:off x="155958" y="1461537"/>
+            <a:ext cx="5609301" cy="4101424"/>
+          </a:xfrm>
+          <a:prstGeom prst="rect">
+            <a:avLst/>
+          </a:prstGeom>
+        </p:spPr>
+      </p:pic>
+      <p:sp>
+        <p:nvSpPr>
+          <p:cNvPr id="8" name="pole tekstowe 7">
+            <a:extLst>
+              <a:ext uri="{FF2B5EF4-FFF2-40B4-BE49-F238E27FC236}">
+                <a16:creationId xmlns:a16="http://schemas.microsoft.com/office/drawing/2014/main" id="{DF53E736-BFCF-219B-20BA-2AAB066FA852}"/>
+              </a:ext>
+            </a:extLst>
+          </p:cNvPr>
+          <p:cNvSpPr txBox="1"/>
+          <p:nvPr/>
+        </p:nvSpPr>
+        <p:spPr>
+          <a:xfrm>
+            <a:off x="1566153" y="5710136"/>
+            <a:ext cx="3691652" cy="369332"/>
+          </a:xfrm>
+          <a:prstGeom prst="rect">
+            <a:avLst/>
+          </a:prstGeom>
+          <a:noFill/>
+        </p:spPr>
+        <p:txBody>
+          <a:bodyPr wrap="none" rtlCol="0">
+            <a:spAutoFit/>
+          </a:bodyPr>
+          <a:lstStyle/>
+          <a:p>
+            <a:r>
+              <a:rPr lang="pl-PL" dirty="0"/>
+              <a:t>50k </a:t>
+            </a:r>
+            <a:r>
+              <a:rPr lang="pl-PL" dirty="0" err="1"/>
+              <a:t>epochs</a:t>
+            </a:r>
+            <a:r>
+              <a:rPr lang="pl-PL" dirty="0"/>
+              <a:t>, SGD </a:t>
+            </a:r>
+            <a:r>
+              <a:rPr lang="pl-PL" dirty="0" err="1"/>
+              <a:t>training</a:t>
+            </a:r>
+            <a:r>
+              <a:rPr lang="pl-PL" dirty="0"/>
+              <a:t> with 0.5 </a:t>
+            </a:r>
+            <a:r>
+              <a:rPr lang="pl-PL" dirty="0" err="1"/>
+              <a:t>lr</a:t>
+            </a:r>
+            <a:endParaRPr lang="en-US" dirty="0"/>
+          </a:p>
+        </p:txBody>
+      </p:sp>
+      <p:sp>
+        <p:nvSpPr>
+          <p:cNvPr id="10" name="pole tekstowe 9">
+            <a:extLst>
+              <a:ext uri="{FF2B5EF4-FFF2-40B4-BE49-F238E27FC236}">
+                <a16:creationId xmlns:a16="http://schemas.microsoft.com/office/drawing/2014/main" id="{80644FE6-BC90-29A9-C18F-4AAA81879230}"/>
+              </a:ext>
+            </a:extLst>
+          </p:cNvPr>
+          <p:cNvSpPr txBox="1"/>
+          <p:nvPr/>
+        </p:nvSpPr>
+        <p:spPr>
+          <a:xfrm>
+            <a:off x="7739974" y="5710136"/>
+            <a:ext cx="3691652" cy="369332"/>
+          </a:xfrm>
+          <a:prstGeom prst="rect">
+            <a:avLst/>
+          </a:prstGeom>
+          <a:noFill/>
+        </p:spPr>
+        <p:txBody>
+          <a:bodyPr wrap="none" rtlCol="0">
+            <a:spAutoFit/>
+          </a:bodyPr>
+          <a:lstStyle/>
+          <a:p>
+            <a:r>
+              <a:rPr lang="pl-PL" dirty="0"/>
+              <a:t>5k </a:t>
+            </a:r>
+            <a:r>
+              <a:rPr lang="pl-PL" dirty="0" err="1"/>
+              <a:t>epochs</a:t>
+            </a:r>
+            <a:r>
+              <a:rPr lang="pl-PL" dirty="0"/>
+              <a:t>, SGD </a:t>
+            </a:r>
+            <a:r>
+              <a:rPr lang="pl-PL" dirty="0" err="1"/>
+              <a:t>training</a:t>
+            </a:r>
+            <a:r>
+              <a:rPr lang="pl-PL" dirty="0"/>
+              <a:t> with 0.5 </a:t>
+            </a:r>
+            <a:r>
+              <a:rPr lang="pl-PL" dirty="0" err="1"/>
+              <a:t>lr</a:t>
+            </a:r>
+            <a:endParaRPr lang="en-US" dirty="0"/>
+          </a:p>
+        </p:txBody>
+      </p:sp>
+      <p:pic>
+        <p:nvPicPr>
+          <p:cNvPr id="12" name="Obraz 11">
+            <a:extLst>
+              <a:ext uri="{FF2B5EF4-FFF2-40B4-BE49-F238E27FC236}">
+                <a16:creationId xmlns:a16="http://schemas.microsoft.com/office/drawing/2014/main" id="{A2E4C8DA-7C76-C678-095C-D888634E16EB}"/>
+              </a:ext>
+            </a:extLst>
+          </p:cNvPr>
+          <p:cNvPicPr>
+            <a:picLocks noChangeAspect="1"/>
+          </p:cNvPicPr>
+          <p:nvPr/>
+        </p:nvPicPr>
+        <p:blipFill>
+          <a:blip r:embed="rId3"/>
+          <a:stretch>
+            <a:fillRect/>
+          </a:stretch>
+        </p:blipFill>
+        <p:spPr>
+          <a:xfrm>
+            <a:off x="5858671" y="1461537"/>
+            <a:ext cx="6013886" cy="4101424"/>
+          </a:xfrm>
+          <a:prstGeom prst="rect">
+            <a:avLst/>
+          </a:prstGeom>
+        </p:spPr>
+      </p:pic>
+    </p:spTree>
+    <p:extLst>
+      <p:ext uri="{BB962C8B-B14F-4D97-AF65-F5344CB8AC3E}">
+        <p14:creationId xmlns:p14="http://schemas.microsoft.com/office/powerpoint/2010/main" val="3327787571"/>
+      </p:ext>
+    </p:extLst>
+  </p:cSld>
+  <p:clrMapOvr>
+    <a:masterClrMapping/>
+  </p:clrMapOvr>
+</p:sld>
+</file>
+
+<file path=ppt/slides/slide2.xml><?xml version="1.0" encoding="utf-8"?>
+<p:sld xmlns:a="http://schemas.openxmlformats.org/drawingml/2006/main" xmlns:r="http://schemas.openxmlformats.org/officeDocument/2006/relationships" xmlns:p="http://schemas.openxmlformats.org/presentationml/2006/main">
+  <p:cSld>
+    <p:spTree>
+      <p:nvGrpSpPr>
+        <p:cNvPr id="1" name=""/>
+        <p:cNvGrpSpPr/>
+        <p:nvPr/>
+      </p:nvGrpSpPr>
+      <p:grpSpPr>
+        <a:xfrm>
+          <a:off x="0" y="0"/>
+          <a:ext cx="0" cy="0"/>
+          <a:chOff x="0" y="0"/>
+          <a:chExt cx="0" cy="0"/>
+        </a:xfrm>
+      </p:grpSpPr>
+      <p:sp>
+        <p:nvSpPr>
+          <p:cNvPr id="2" name="Tytuł 1">
+            <a:extLst>
+              <a:ext uri="{FF2B5EF4-FFF2-40B4-BE49-F238E27FC236}">
                 <a16:creationId xmlns:a16="http://schemas.microsoft.com/office/drawing/2014/main" id="{3072F7CF-677C-8ACA-BEA6-0B52D8F771B1}"/>
               </a:ext>
             </a:extLst>
@@ -3360,10 +3954,34 @@
         </p:nvSpPr>
         <p:spPr/>
         <p:txBody>
-          <a:bodyPr/>
-          <a:lstStyle/>
-          <a:p>
-            <a:endParaRPr lang="en-US"/>
+          <a:bodyPr>
+            <a:normAutofit fontScale="90000"/>
+          </a:bodyPr>
+          <a:lstStyle/>
+          <a:p>
+            <a:br>
+              <a:rPr lang="pl-PL" dirty="0"/>
+            </a:br>
+            <a:r>
+              <a:rPr lang="pl-PL" dirty="0"/>
+              <a:t>Ex1</a:t>
+            </a:r>
+            <a:br>
+              <a:rPr lang="pl-PL" dirty="0"/>
+            </a:br>
+            <a:r>
+              <a:rPr lang="pl-PL" dirty="0" err="1"/>
+              <a:t>Adding</a:t>
+            </a:r>
+            <a:r>
+              <a:rPr lang="pl-PL" dirty="0"/>
+              <a:t>, </a:t>
+            </a:r>
+            <a:r>
+              <a:rPr lang="pl-PL" dirty="0" err="1"/>
+              <a:t>multiplication</a:t>
+            </a:r>
+            <a:endParaRPr lang="en-US" dirty="0"/>
           </a:p>
         </p:txBody>
       </p:sp>
@@ -3396,6 +4014,1644 @@
     <p:extLst>
       <p:ext uri="{BB962C8B-B14F-4D97-AF65-F5344CB8AC3E}">
         <p14:creationId xmlns:p14="http://schemas.microsoft.com/office/powerpoint/2010/main" val="3900394705"/>
+      </p:ext>
+    </p:extLst>
+  </p:cSld>
+  <p:clrMapOvr>
+    <a:masterClrMapping/>
+  </p:clrMapOvr>
+</p:sld>
+</file>
+
+<file path=ppt/slides/slide3.xml><?xml version="1.0" encoding="utf-8"?>
+<p:sld xmlns:a="http://schemas.openxmlformats.org/drawingml/2006/main" xmlns:r="http://schemas.openxmlformats.org/officeDocument/2006/relationships" xmlns:p="http://schemas.openxmlformats.org/presentationml/2006/main">
+  <p:cSld>
+    <p:spTree>
+      <p:nvGrpSpPr>
+        <p:cNvPr id="1" name=""/>
+        <p:cNvGrpSpPr/>
+        <p:nvPr/>
+      </p:nvGrpSpPr>
+      <p:grpSpPr>
+        <a:xfrm>
+          <a:off x="0" y="0"/>
+          <a:ext cx="0" cy="0"/>
+          <a:chOff x="0" y="0"/>
+          <a:chExt cx="0" cy="0"/>
+        </a:xfrm>
+      </p:grpSpPr>
+      <p:sp>
+        <p:nvSpPr>
+          <p:cNvPr id="2" name="Tytuł 1">
+            <a:extLst>
+              <a:ext uri="{FF2B5EF4-FFF2-40B4-BE49-F238E27FC236}">
+                <a16:creationId xmlns:a16="http://schemas.microsoft.com/office/drawing/2014/main" id="{34E350CA-E78B-A40E-CFEB-C7AB5AB0AA3B}"/>
+              </a:ext>
+            </a:extLst>
+          </p:cNvPr>
+          <p:cNvSpPr>
+            <a:spLocks noGrp="1"/>
+          </p:cNvSpPr>
+          <p:nvPr>
+            <p:ph type="title"/>
+          </p:nvPr>
+        </p:nvSpPr>
+        <p:spPr/>
+        <p:txBody>
+          <a:bodyPr/>
+          <a:lstStyle/>
+          <a:p>
+            <a:r>
+              <a:rPr lang="pl-PL" dirty="0" err="1"/>
+              <a:t>Adding</a:t>
+            </a:r>
+            <a:r>
+              <a:rPr lang="pl-PL" dirty="0"/>
+              <a:t> </a:t>
+            </a:r>
+            <a:r>
+              <a:rPr lang="pl-PL" dirty="0" err="1"/>
+              <a:t>numbers</a:t>
+            </a:r>
+            <a:endParaRPr lang="en-US" dirty="0"/>
+          </a:p>
+        </p:txBody>
+      </p:sp>
+      <p:sp>
+        <p:nvSpPr>
+          <p:cNvPr id="3" name="Symbol zastępczy zawartości 2">
+            <a:extLst>
+              <a:ext uri="{FF2B5EF4-FFF2-40B4-BE49-F238E27FC236}">
+                <a16:creationId xmlns:a16="http://schemas.microsoft.com/office/drawing/2014/main" id="{9924DD97-8099-F21E-7831-5B0564811023}"/>
+              </a:ext>
+            </a:extLst>
+          </p:cNvPr>
+          <p:cNvSpPr>
+            <a:spLocks noGrp="1"/>
+          </p:cNvSpPr>
+          <p:nvPr>
+            <p:ph idx="1"/>
+          </p:nvPr>
+        </p:nvSpPr>
+        <p:spPr/>
+        <p:txBody>
+          <a:bodyPr/>
+          <a:lstStyle/>
+          <a:p>
+            <a:pPr marL="0" indent="0" latinLnBrk="1">
+              <a:buNone/>
+            </a:pPr>
+            <a:r>
+              <a:rPr lang="pl-PL" dirty="0"/>
+              <a:t>Input vs GT </a:t>
+            </a:r>
+            <a:r>
+              <a:rPr lang="pl-PL" dirty="0" err="1"/>
+              <a:t>output</a:t>
+            </a:r>
+            <a:r>
+              <a:rPr lang="pl-PL" dirty="0"/>
+              <a:t> vs NN </a:t>
+            </a:r>
+            <a:r>
+              <a:rPr lang="pl-PL" dirty="0" err="1"/>
+              <a:t>output</a:t>
+            </a:r>
+            <a:r>
+              <a:rPr lang="pl-PL" dirty="0"/>
+              <a:t> </a:t>
+            </a:r>
+            <a:r>
+              <a:rPr lang="pl-PL" dirty="0" err="1"/>
+              <a:t>example</a:t>
+            </a:r>
+            <a:r>
+              <a:rPr lang="pl-PL" dirty="0"/>
+              <a:t>:</a:t>
+            </a:r>
+          </a:p>
+          <a:p>
+            <a:pPr marL="0" indent="0" latinLnBrk="1">
+              <a:buNone/>
+            </a:pPr>
+            <a:r>
+              <a:rPr lang="pl-PL" dirty="0"/>
+              <a:t>X1:      [0, 0, 0]</a:t>
+            </a:r>
+          </a:p>
+          <a:p>
+            <a:pPr marL="0" indent="0" latinLnBrk="1">
+              <a:buNone/>
+            </a:pPr>
+            <a:r>
+              <a:rPr lang="pl-PL" dirty="0"/>
+              <a:t>X2:      [1, 0, 0]</a:t>
+            </a:r>
+          </a:p>
+          <a:p>
+            <a:pPr marL="0" indent="0" latinLnBrk="1">
+              <a:buNone/>
+            </a:pPr>
+            <a:r>
+              <a:rPr lang="pl-PL" dirty="0"/>
+              <a:t>Y:       [0, 1, 0, 0]</a:t>
+            </a:r>
+          </a:p>
+          <a:p>
+            <a:pPr marL="0" indent="0" latinLnBrk="1">
+              <a:buNone/>
+            </a:pPr>
+            <a:r>
+              <a:rPr lang="pl-PL" dirty="0" err="1"/>
+              <a:t>Y_pred</a:t>
+            </a:r>
+            <a:r>
+              <a:rPr lang="pl-PL" dirty="0"/>
+              <a:t>:  ['0.00', '0.99', '0.00', '0.10']</a:t>
+            </a:r>
+          </a:p>
+          <a:p>
+            <a:pPr marL="0" indent="0">
+              <a:buNone/>
+            </a:pPr>
+            <a:endParaRPr lang="en-US" dirty="0"/>
+          </a:p>
+        </p:txBody>
+      </p:sp>
+    </p:spTree>
+    <p:extLst>
+      <p:ext uri="{BB962C8B-B14F-4D97-AF65-F5344CB8AC3E}">
+        <p14:creationId xmlns:p14="http://schemas.microsoft.com/office/powerpoint/2010/main" val="2357710698"/>
+      </p:ext>
+    </p:extLst>
+  </p:cSld>
+  <p:clrMapOvr>
+    <a:masterClrMapping/>
+  </p:clrMapOvr>
+</p:sld>
+</file>
+
+<file path=ppt/slides/slide4.xml><?xml version="1.0" encoding="utf-8"?>
+<p:sld xmlns:a="http://schemas.openxmlformats.org/drawingml/2006/main" xmlns:r="http://schemas.openxmlformats.org/officeDocument/2006/relationships" xmlns:p="http://schemas.openxmlformats.org/presentationml/2006/main">
+  <p:cSld>
+    <p:spTree>
+      <p:nvGrpSpPr>
+        <p:cNvPr id="1" name="">
+          <a:extLst>
+            <a:ext uri="{FF2B5EF4-FFF2-40B4-BE49-F238E27FC236}">
+              <a16:creationId xmlns:a16="http://schemas.microsoft.com/office/drawing/2014/main" id="{D20B1E09-694A-9626-496E-AC2B0AC0A704}"/>
+            </a:ext>
+          </a:extLst>
+        </p:cNvPr>
+        <p:cNvGrpSpPr/>
+        <p:nvPr/>
+      </p:nvGrpSpPr>
+      <p:grpSpPr>
+        <a:xfrm>
+          <a:off x="0" y="0"/>
+          <a:ext cx="0" cy="0"/>
+          <a:chOff x="0" y="0"/>
+          <a:chExt cx="0" cy="0"/>
+        </a:xfrm>
+      </p:grpSpPr>
+      <p:sp>
+        <p:nvSpPr>
+          <p:cNvPr id="2" name="Tytuł 1">
+            <a:extLst>
+              <a:ext uri="{FF2B5EF4-FFF2-40B4-BE49-F238E27FC236}">
+                <a16:creationId xmlns:a16="http://schemas.microsoft.com/office/drawing/2014/main" id="{6AC9EA85-5309-7F46-254B-D8DCF60BC4CC}"/>
+              </a:ext>
+            </a:extLst>
+          </p:cNvPr>
+          <p:cNvSpPr>
+            <a:spLocks noGrp="1"/>
+          </p:cNvSpPr>
+          <p:nvPr>
+            <p:ph type="title"/>
+          </p:nvPr>
+        </p:nvSpPr>
+        <p:spPr/>
+        <p:txBody>
+          <a:bodyPr/>
+          <a:lstStyle/>
+          <a:p>
+            <a:r>
+              <a:rPr lang="pl-PL" dirty="0" err="1"/>
+              <a:t>Adding</a:t>
+            </a:r>
+            <a:r>
+              <a:rPr lang="pl-PL" dirty="0"/>
+              <a:t> </a:t>
+            </a:r>
+            <a:r>
+              <a:rPr lang="pl-PL" dirty="0" err="1"/>
+              <a:t>numbers</a:t>
+            </a:r>
+            <a:endParaRPr lang="en-US" dirty="0"/>
+          </a:p>
+        </p:txBody>
+      </p:sp>
+      <p:sp>
+        <p:nvSpPr>
+          <p:cNvPr id="3" name="Symbol zastępczy zawartości 2">
+            <a:extLst>
+              <a:ext uri="{FF2B5EF4-FFF2-40B4-BE49-F238E27FC236}">
+                <a16:creationId xmlns:a16="http://schemas.microsoft.com/office/drawing/2014/main" id="{88CFB63B-DFB5-28B7-6D71-9C2D6A1BE539}"/>
+              </a:ext>
+            </a:extLst>
+          </p:cNvPr>
+          <p:cNvSpPr>
+            <a:spLocks noGrp="1"/>
+          </p:cNvSpPr>
+          <p:nvPr>
+            <p:ph idx="1"/>
+          </p:nvPr>
+        </p:nvSpPr>
+        <p:spPr/>
+        <p:txBody>
+          <a:bodyPr>
+            <a:normAutofit/>
+          </a:bodyPr>
+          <a:lstStyle/>
+          <a:p>
+            <a:pPr marL="0" indent="0" latinLnBrk="1">
+              <a:buNone/>
+            </a:pPr>
+            <a:r>
+              <a:rPr lang="pl-PL" dirty="0" err="1"/>
+              <a:t>Dataset</a:t>
+            </a:r>
+            <a:r>
+              <a:rPr lang="pl-PL" dirty="0"/>
+              <a:t> </a:t>
+            </a:r>
+            <a:r>
+              <a:rPr lang="pl-PL" dirty="0" err="1"/>
+              <a:t>generation</a:t>
+            </a:r>
+            <a:r>
+              <a:rPr lang="pl-PL" dirty="0"/>
+              <a:t>:</a:t>
+            </a:r>
+          </a:p>
+          <a:p>
+            <a:pPr marL="0" indent="0" latinLnBrk="1">
+              <a:buNone/>
+            </a:pPr>
+            <a:endParaRPr lang="pl-PL" dirty="0"/>
+          </a:p>
+          <a:p>
+            <a:pPr marL="0" indent="0" latinLnBrk="1">
+              <a:buNone/>
+            </a:pPr>
+            <a:r>
+              <a:rPr lang="pl-PL" dirty="0" err="1"/>
+              <a:t>Traning</a:t>
+            </a:r>
+            <a:r>
+              <a:rPr lang="pl-PL" dirty="0"/>
+              <a:t> </a:t>
+            </a:r>
+            <a:r>
+              <a:rPr lang="pl-PL" dirty="0" err="1"/>
+              <a:t>dataset</a:t>
+            </a:r>
+            <a:r>
+              <a:rPr lang="pl-PL" dirty="0"/>
+              <a:t> – </a:t>
+            </a:r>
+            <a:r>
+              <a:rPr lang="pl-PL" dirty="0" err="1"/>
+              <a:t>all</a:t>
+            </a:r>
+            <a:r>
+              <a:rPr lang="pl-PL" dirty="0"/>
+              <a:t> „m” bit </a:t>
+            </a:r>
+            <a:r>
+              <a:rPr lang="pl-PL" dirty="0" err="1"/>
+              <a:t>number</a:t>
+            </a:r>
+            <a:r>
+              <a:rPr lang="pl-PL" dirty="0"/>
+              <a:t> </a:t>
+            </a:r>
+            <a:r>
+              <a:rPr lang="pl-PL" dirty="0" err="1"/>
+              <a:t>pairs</a:t>
+            </a:r>
+            <a:r>
+              <a:rPr lang="pl-PL" dirty="0"/>
+              <a:t> </a:t>
+            </a:r>
+            <a:r>
+              <a:rPr lang="pl-PL" dirty="0" err="1"/>
+              <a:t>generation</a:t>
+            </a:r>
+            <a:endParaRPr lang="pl-PL" dirty="0"/>
+          </a:p>
+          <a:p>
+            <a:pPr marL="0" indent="0" latinLnBrk="1">
+              <a:buNone/>
+            </a:pPr>
+            <a:r>
+              <a:rPr lang="pl-PL" dirty="0"/>
+              <a:t>Test </a:t>
+            </a:r>
+            <a:r>
+              <a:rPr lang="pl-PL" dirty="0" err="1"/>
+              <a:t>dataset</a:t>
+            </a:r>
+            <a:r>
+              <a:rPr lang="pl-PL" dirty="0"/>
+              <a:t> – </a:t>
+            </a:r>
+            <a:r>
+              <a:rPr lang="pl-PL" dirty="0" err="1"/>
+              <a:t>all</a:t>
+            </a:r>
+            <a:r>
+              <a:rPr lang="pl-PL" dirty="0"/>
+              <a:t> „n” (n&gt;m) </a:t>
+            </a:r>
+            <a:r>
+              <a:rPr lang="pl-PL" dirty="0" err="1"/>
+              <a:t>without</a:t>
+            </a:r>
+            <a:r>
+              <a:rPr lang="pl-PL" dirty="0"/>
+              <a:t> </a:t>
+            </a:r>
+            <a:r>
+              <a:rPr lang="pl-PL" dirty="0" err="1"/>
+              <a:t>numbers</a:t>
+            </a:r>
+            <a:r>
+              <a:rPr lang="pl-PL" dirty="0"/>
+              <a:t> in </a:t>
+            </a:r>
+            <a:r>
+              <a:rPr lang="pl-PL" dirty="0" err="1"/>
+              <a:t>train</a:t>
+            </a:r>
+            <a:r>
+              <a:rPr lang="pl-PL" dirty="0"/>
+              <a:t> ds.</a:t>
+            </a:r>
+          </a:p>
+          <a:p>
+            <a:pPr marL="0" indent="0" latinLnBrk="1">
+              <a:buNone/>
+            </a:pPr>
+            <a:r>
+              <a:rPr lang="pl-PL" dirty="0" err="1"/>
+              <a:t>Additional</a:t>
+            </a:r>
+            <a:r>
+              <a:rPr lang="pl-PL" dirty="0"/>
+              <a:t> part „k” of test </a:t>
+            </a:r>
+            <a:r>
+              <a:rPr lang="pl-PL" dirty="0" err="1"/>
+              <a:t>ds</a:t>
+            </a:r>
+            <a:r>
+              <a:rPr lang="pl-PL" dirty="0"/>
+              <a:t> </a:t>
+            </a:r>
+            <a:r>
+              <a:rPr lang="pl-PL" dirty="0" err="1"/>
+              <a:t>is</a:t>
+            </a:r>
+            <a:r>
+              <a:rPr lang="pl-PL" dirty="0"/>
+              <a:t> </a:t>
+            </a:r>
+            <a:r>
+              <a:rPr lang="pl-PL" dirty="0" err="1"/>
+              <a:t>moved</a:t>
+            </a:r>
+            <a:r>
+              <a:rPr lang="pl-PL" dirty="0"/>
+              <a:t> to </a:t>
+            </a:r>
+            <a:r>
+              <a:rPr lang="pl-PL" dirty="0" err="1"/>
+              <a:t>train</a:t>
+            </a:r>
+            <a:r>
+              <a:rPr lang="pl-PL" dirty="0"/>
+              <a:t> ds. (network </a:t>
+            </a:r>
+            <a:r>
+              <a:rPr lang="pl-PL" dirty="0" err="1"/>
+              <a:t>have</a:t>
+            </a:r>
+            <a:r>
+              <a:rPr lang="pl-PL" dirty="0"/>
+              <a:t> to </a:t>
+            </a:r>
+            <a:r>
+              <a:rPr lang="pl-PL" dirty="0" err="1"/>
+              <a:t>know</a:t>
+            </a:r>
+            <a:r>
+              <a:rPr lang="pl-PL" dirty="0"/>
+              <a:t> </a:t>
+            </a:r>
+            <a:r>
+              <a:rPr lang="pl-PL" dirty="0" err="1"/>
+              <a:t>what</a:t>
+            </a:r>
+            <a:r>
+              <a:rPr lang="pl-PL" dirty="0"/>
+              <a:t> </a:t>
+            </a:r>
+            <a:r>
+              <a:rPr lang="pl-PL" dirty="0" err="1"/>
+              <a:t>all</a:t>
+            </a:r>
+            <a:r>
+              <a:rPr lang="pl-PL" dirty="0"/>
+              <a:t> </a:t>
+            </a:r>
+            <a:r>
+              <a:rPr lang="pl-PL" dirty="0" err="1"/>
+              <a:t>inputs</a:t>
+            </a:r>
+            <a:r>
+              <a:rPr lang="pl-PL" dirty="0"/>
+              <a:t>/</a:t>
+            </a:r>
+            <a:r>
+              <a:rPr lang="pl-PL" dirty="0" err="1"/>
+              <a:t>outputs</a:t>
+            </a:r>
+            <a:r>
+              <a:rPr lang="pl-PL" dirty="0"/>
+              <a:t> </a:t>
+            </a:r>
+            <a:r>
+              <a:rPr lang="pl-PL" dirty="0" err="1"/>
+              <a:t>are</a:t>
+            </a:r>
+            <a:r>
+              <a:rPr lang="pl-PL" dirty="0"/>
+              <a:t> </a:t>
+            </a:r>
+            <a:r>
+              <a:rPr lang="pl-PL" dirty="0" err="1"/>
+              <a:t>doing</a:t>
+            </a:r>
+            <a:r>
+              <a:rPr lang="pl-PL" dirty="0"/>
+              <a:t>)</a:t>
+            </a:r>
+          </a:p>
+        </p:txBody>
+      </p:sp>
+    </p:spTree>
+    <p:extLst>
+      <p:ext uri="{BB962C8B-B14F-4D97-AF65-F5344CB8AC3E}">
+        <p14:creationId xmlns:p14="http://schemas.microsoft.com/office/powerpoint/2010/main" val="1999117989"/>
+      </p:ext>
+    </p:extLst>
+  </p:cSld>
+  <p:clrMapOvr>
+    <a:masterClrMapping/>
+  </p:clrMapOvr>
+</p:sld>
+</file>
+
+<file path=ppt/slides/slide5.xml><?xml version="1.0" encoding="utf-8"?>
+<p:sld xmlns:a="http://schemas.openxmlformats.org/drawingml/2006/main" xmlns:r="http://schemas.openxmlformats.org/officeDocument/2006/relationships" xmlns:p="http://schemas.openxmlformats.org/presentationml/2006/main">
+  <p:cSld>
+    <p:spTree>
+      <p:nvGrpSpPr>
+        <p:cNvPr id="1" name="">
+          <a:extLst>
+            <a:ext uri="{FF2B5EF4-FFF2-40B4-BE49-F238E27FC236}">
+              <a16:creationId xmlns:a16="http://schemas.microsoft.com/office/drawing/2014/main" id="{B5E5165C-4964-3DE6-0ECA-CC6158533496}"/>
+            </a:ext>
+          </a:extLst>
+        </p:cNvPr>
+        <p:cNvGrpSpPr/>
+        <p:nvPr/>
+      </p:nvGrpSpPr>
+      <p:grpSpPr>
+        <a:xfrm>
+          <a:off x="0" y="0"/>
+          <a:ext cx="0" cy="0"/>
+          <a:chOff x="0" y="0"/>
+          <a:chExt cx="0" cy="0"/>
+        </a:xfrm>
+      </p:grpSpPr>
+      <p:sp>
+        <p:nvSpPr>
+          <p:cNvPr id="2" name="Tytuł 1">
+            <a:extLst>
+              <a:ext uri="{FF2B5EF4-FFF2-40B4-BE49-F238E27FC236}">
+                <a16:creationId xmlns:a16="http://schemas.microsoft.com/office/drawing/2014/main" id="{2FEBC7E7-5D2D-1303-D418-9CC97F9CFF87}"/>
+              </a:ext>
+            </a:extLst>
+          </p:cNvPr>
+          <p:cNvSpPr>
+            <a:spLocks noGrp="1"/>
+          </p:cNvSpPr>
+          <p:nvPr>
+            <p:ph type="title"/>
+          </p:nvPr>
+        </p:nvSpPr>
+        <p:spPr/>
+        <p:txBody>
+          <a:bodyPr/>
+          <a:lstStyle/>
+          <a:p>
+            <a:r>
+              <a:rPr lang="pl-PL" dirty="0" err="1"/>
+              <a:t>Adding</a:t>
+            </a:r>
+            <a:r>
+              <a:rPr lang="pl-PL" dirty="0"/>
+              <a:t> </a:t>
+            </a:r>
+            <a:r>
+              <a:rPr lang="pl-PL" dirty="0" err="1"/>
+              <a:t>numbers</a:t>
+            </a:r>
+            <a:endParaRPr lang="en-US" dirty="0"/>
+          </a:p>
+        </p:txBody>
+      </p:sp>
+      <p:sp>
+        <p:nvSpPr>
+          <p:cNvPr id="3" name="Symbol zastępczy zawartości 2">
+            <a:extLst>
+              <a:ext uri="{FF2B5EF4-FFF2-40B4-BE49-F238E27FC236}">
+                <a16:creationId xmlns:a16="http://schemas.microsoft.com/office/drawing/2014/main" id="{1B581BA3-7BC6-6A7F-3B62-0117D3433B1A}"/>
+              </a:ext>
+            </a:extLst>
+          </p:cNvPr>
+          <p:cNvSpPr>
+            <a:spLocks noGrp="1"/>
+          </p:cNvSpPr>
+          <p:nvPr>
+            <p:ph idx="1"/>
+          </p:nvPr>
+        </p:nvSpPr>
+        <p:spPr>
+          <a:xfrm>
+            <a:off x="1718993" y="2353469"/>
+            <a:ext cx="3354420" cy="1997301"/>
+          </a:xfrm>
+        </p:spPr>
+        <p:txBody>
+          <a:bodyPr>
+            <a:normAutofit fontScale="92500" lnSpcReduction="20000"/>
+          </a:bodyPr>
+          <a:lstStyle/>
+          <a:p>
+            <a:pPr marL="0" indent="0" latinLnBrk="1">
+              <a:buNone/>
+            </a:pPr>
+            <a:r>
+              <a:rPr lang="pl-PL" dirty="0"/>
+              <a:t>n = 3</a:t>
+            </a:r>
+          </a:p>
+          <a:p>
+            <a:pPr marL="0" indent="0" latinLnBrk="1">
+              <a:buNone/>
+            </a:pPr>
+            <a:r>
+              <a:rPr lang="pl-PL" dirty="0"/>
+              <a:t>m = 2</a:t>
+            </a:r>
+          </a:p>
+          <a:p>
+            <a:pPr marL="0" indent="0" latinLnBrk="1">
+              <a:buNone/>
+            </a:pPr>
+            <a:r>
+              <a:rPr lang="pl-PL" dirty="0"/>
+              <a:t>k = 0.8</a:t>
+            </a:r>
+          </a:p>
+          <a:p>
+            <a:pPr marL="0" indent="0" latinLnBrk="1">
+              <a:buNone/>
+            </a:pPr>
+            <a:r>
+              <a:rPr lang="pl-PL" dirty="0"/>
+              <a:t>rozmiar </a:t>
+            </a:r>
+            <a:r>
+              <a:rPr lang="pl-PL" dirty="0" err="1"/>
+              <a:t>ds</a:t>
+            </a:r>
+            <a:r>
+              <a:rPr lang="pl-PL" dirty="0"/>
+              <a:t> </a:t>
+            </a:r>
+            <a:r>
+              <a:rPr lang="pl-PL" dirty="0" err="1"/>
+              <a:t>train</a:t>
+            </a:r>
+            <a:r>
+              <a:rPr lang="pl-PL" dirty="0"/>
+              <a:t> =  54 </a:t>
+            </a:r>
+            <a:br>
+              <a:rPr lang="pl-PL" dirty="0"/>
+            </a:br>
+            <a:r>
+              <a:rPr lang="pl-PL" dirty="0"/>
+              <a:t>rozmiar </a:t>
+            </a:r>
+            <a:r>
+              <a:rPr lang="pl-PL" dirty="0" err="1"/>
+              <a:t>ds</a:t>
+            </a:r>
+            <a:r>
+              <a:rPr lang="pl-PL" dirty="0"/>
+              <a:t> test =  10</a:t>
+            </a:r>
+          </a:p>
+          <a:p>
+            <a:pPr marL="0" indent="0" latinLnBrk="1">
+              <a:buNone/>
+            </a:pPr>
+            <a:endParaRPr lang="pl-PL" dirty="0"/>
+          </a:p>
+        </p:txBody>
+      </p:sp>
+      <p:pic>
+        <p:nvPicPr>
+          <p:cNvPr id="5" name="Obraz 4">
+            <a:extLst>
+              <a:ext uri="{FF2B5EF4-FFF2-40B4-BE49-F238E27FC236}">
+                <a16:creationId xmlns:a16="http://schemas.microsoft.com/office/drawing/2014/main" id="{0DFD90D2-F681-756C-C851-398AB455F191}"/>
+              </a:ext>
+            </a:extLst>
+          </p:cNvPr>
+          <p:cNvPicPr>
+            <a:picLocks noChangeAspect="1"/>
+          </p:cNvPicPr>
+          <p:nvPr/>
+        </p:nvPicPr>
+        <p:blipFill>
+          <a:blip r:embed="rId2"/>
+          <a:stretch>
+            <a:fillRect/>
+          </a:stretch>
+        </p:blipFill>
+        <p:spPr>
+          <a:xfrm>
+            <a:off x="5073413" y="1027906"/>
+            <a:ext cx="6792273" cy="5010849"/>
+          </a:xfrm>
+          <a:prstGeom prst="rect">
+            <a:avLst/>
+          </a:prstGeom>
+        </p:spPr>
+      </p:pic>
+    </p:spTree>
+    <p:extLst>
+      <p:ext uri="{BB962C8B-B14F-4D97-AF65-F5344CB8AC3E}">
+        <p14:creationId xmlns:p14="http://schemas.microsoft.com/office/powerpoint/2010/main" val="3968719968"/>
+      </p:ext>
+    </p:extLst>
+  </p:cSld>
+  <p:clrMapOvr>
+    <a:masterClrMapping/>
+  </p:clrMapOvr>
+</p:sld>
+</file>
+
+<file path=ppt/slides/slide6.xml><?xml version="1.0" encoding="utf-8"?>
+<p:sld xmlns:a="http://schemas.openxmlformats.org/drawingml/2006/main" xmlns:r="http://schemas.openxmlformats.org/officeDocument/2006/relationships" xmlns:p="http://schemas.openxmlformats.org/presentationml/2006/main">
+  <p:cSld>
+    <p:spTree>
+      <p:nvGrpSpPr>
+        <p:cNvPr id="1" name="">
+          <a:extLst>
+            <a:ext uri="{FF2B5EF4-FFF2-40B4-BE49-F238E27FC236}">
+              <a16:creationId xmlns:a16="http://schemas.microsoft.com/office/drawing/2014/main" id="{22788F39-E39D-3418-7178-AD84F6EA7500}"/>
+            </a:ext>
+          </a:extLst>
+        </p:cNvPr>
+        <p:cNvGrpSpPr/>
+        <p:nvPr/>
+      </p:nvGrpSpPr>
+      <p:grpSpPr>
+        <a:xfrm>
+          <a:off x="0" y="0"/>
+          <a:ext cx="0" cy="0"/>
+          <a:chOff x="0" y="0"/>
+          <a:chExt cx="0" cy="0"/>
+        </a:xfrm>
+      </p:grpSpPr>
+      <p:sp>
+        <p:nvSpPr>
+          <p:cNvPr id="2" name="Tytuł 1">
+            <a:extLst>
+              <a:ext uri="{FF2B5EF4-FFF2-40B4-BE49-F238E27FC236}">
+                <a16:creationId xmlns:a16="http://schemas.microsoft.com/office/drawing/2014/main" id="{A5F09C81-62F6-720D-41A3-69330B21E8BF}"/>
+              </a:ext>
+            </a:extLst>
+          </p:cNvPr>
+          <p:cNvSpPr>
+            <a:spLocks noGrp="1"/>
+          </p:cNvSpPr>
+          <p:nvPr>
+            <p:ph type="title"/>
+          </p:nvPr>
+        </p:nvSpPr>
+        <p:spPr/>
+        <p:txBody>
+          <a:bodyPr/>
+          <a:lstStyle/>
+          <a:p>
+            <a:r>
+              <a:rPr lang="pl-PL" dirty="0" err="1"/>
+              <a:t>Adding</a:t>
+            </a:r>
+            <a:r>
+              <a:rPr lang="pl-PL" dirty="0"/>
+              <a:t> </a:t>
+            </a:r>
+            <a:r>
+              <a:rPr lang="pl-PL" dirty="0" err="1"/>
+              <a:t>numbers</a:t>
+            </a:r>
+            <a:endParaRPr lang="en-US" dirty="0"/>
+          </a:p>
+        </p:txBody>
+      </p:sp>
+      <p:sp>
+        <p:nvSpPr>
+          <p:cNvPr id="3" name="Symbol zastępczy zawartości 2">
+            <a:extLst>
+              <a:ext uri="{FF2B5EF4-FFF2-40B4-BE49-F238E27FC236}">
+                <a16:creationId xmlns:a16="http://schemas.microsoft.com/office/drawing/2014/main" id="{DA12D323-985D-B119-45B6-4ACD8EDD9459}"/>
+              </a:ext>
+            </a:extLst>
+          </p:cNvPr>
+          <p:cNvSpPr>
+            <a:spLocks noGrp="1"/>
+          </p:cNvSpPr>
+          <p:nvPr>
+            <p:ph idx="1"/>
+          </p:nvPr>
+        </p:nvSpPr>
+        <p:spPr>
+          <a:xfrm>
+            <a:off x="1718993" y="2353469"/>
+            <a:ext cx="3354420" cy="1997301"/>
+          </a:xfrm>
+        </p:spPr>
+        <p:txBody>
+          <a:bodyPr>
+            <a:normAutofit fontScale="92500" lnSpcReduction="20000"/>
+          </a:bodyPr>
+          <a:lstStyle/>
+          <a:p>
+            <a:pPr marL="0" indent="0" latinLnBrk="1">
+              <a:buNone/>
+            </a:pPr>
+            <a:r>
+              <a:rPr lang="pl-PL" dirty="0"/>
+              <a:t>n = 4</a:t>
+            </a:r>
+          </a:p>
+          <a:p>
+            <a:pPr marL="0" indent="0" latinLnBrk="1">
+              <a:buNone/>
+            </a:pPr>
+            <a:r>
+              <a:rPr lang="pl-PL" dirty="0"/>
+              <a:t>m = 2</a:t>
+            </a:r>
+          </a:p>
+          <a:p>
+            <a:pPr marL="0" indent="0" latinLnBrk="1">
+              <a:buNone/>
+            </a:pPr>
+            <a:r>
+              <a:rPr lang="pl-PL" dirty="0"/>
+              <a:t>k = 0.5</a:t>
+            </a:r>
+          </a:p>
+          <a:p>
+            <a:pPr marL="0" indent="0" latinLnBrk="1">
+              <a:buNone/>
+            </a:pPr>
+            <a:r>
+              <a:rPr lang="pl-PL" dirty="0"/>
+              <a:t>rozmiar </a:t>
+            </a:r>
+            <a:r>
+              <a:rPr lang="pl-PL" dirty="0" err="1"/>
+              <a:t>ds</a:t>
+            </a:r>
+            <a:r>
+              <a:rPr lang="pl-PL" dirty="0"/>
+              <a:t> </a:t>
+            </a:r>
+            <a:r>
+              <a:rPr lang="pl-PL" dirty="0" err="1"/>
+              <a:t>train</a:t>
+            </a:r>
+            <a:r>
+              <a:rPr lang="pl-PL" dirty="0"/>
+              <a:t> =  136 </a:t>
+            </a:r>
+            <a:br>
+              <a:rPr lang="pl-PL" dirty="0"/>
+            </a:br>
+            <a:r>
+              <a:rPr lang="pl-PL" dirty="0"/>
+              <a:t>rozmiar </a:t>
+            </a:r>
+            <a:r>
+              <a:rPr lang="pl-PL" dirty="0" err="1"/>
+              <a:t>ds</a:t>
+            </a:r>
+            <a:r>
+              <a:rPr lang="pl-PL" dirty="0"/>
+              <a:t> test =  120</a:t>
+            </a:r>
+          </a:p>
+          <a:p>
+            <a:pPr marL="0" indent="0" latinLnBrk="1">
+              <a:buNone/>
+            </a:pPr>
+            <a:endParaRPr lang="pl-PL" dirty="0"/>
+          </a:p>
+        </p:txBody>
+      </p:sp>
+      <p:pic>
+        <p:nvPicPr>
+          <p:cNvPr id="6" name="Obraz 5">
+            <a:extLst>
+              <a:ext uri="{FF2B5EF4-FFF2-40B4-BE49-F238E27FC236}">
+                <a16:creationId xmlns:a16="http://schemas.microsoft.com/office/drawing/2014/main" id="{A0D3DDF6-280C-D104-24D5-E93CED2C4658}"/>
+              </a:ext>
+            </a:extLst>
+          </p:cNvPr>
+          <p:cNvPicPr>
+            <a:picLocks noChangeAspect="1"/>
+          </p:cNvPicPr>
+          <p:nvPr/>
+        </p:nvPicPr>
+        <p:blipFill>
+          <a:blip r:embed="rId2"/>
+          <a:stretch>
+            <a:fillRect/>
+          </a:stretch>
+        </p:blipFill>
+        <p:spPr>
+          <a:xfrm>
+            <a:off x="5073413" y="741904"/>
+            <a:ext cx="6858957" cy="5220429"/>
+          </a:xfrm>
+          <a:prstGeom prst="rect">
+            <a:avLst/>
+          </a:prstGeom>
+        </p:spPr>
+      </p:pic>
+    </p:spTree>
+    <p:extLst>
+      <p:ext uri="{BB962C8B-B14F-4D97-AF65-F5344CB8AC3E}">
+        <p14:creationId xmlns:p14="http://schemas.microsoft.com/office/powerpoint/2010/main" val="2205768547"/>
+      </p:ext>
+    </p:extLst>
+  </p:cSld>
+  <p:clrMapOvr>
+    <a:masterClrMapping/>
+  </p:clrMapOvr>
+</p:sld>
+</file>
+
+<file path=ppt/slides/slide7.xml><?xml version="1.0" encoding="utf-8"?>
+<p:sld xmlns:a="http://schemas.openxmlformats.org/drawingml/2006/main" xmlns:r="http://schemas.openxmlformats.org/officeDocument/2006/relationships" xmlns:p="http://schemas.openxmlformats.org/presentationml/2006/main">
+  <p:cSld>
+    <p:spTree>
+      <p:nvGrpSpPr>
+        <p:cNvPr id="1" name="">
+          <a:extLst>
+            <a:ext uri="{FF2B5EF4-FFF2-40B4-BE49-F238E27FC236}">
+              <a16:creationId xmlns:a16="http://schemas.microsoft.com/office/drawing/2014/main" id="{747C3463-7871-F071-2913-C6B14742BE2B}"/>
+            </a:ext>
+          </a:extLst>
+        </p:cNvPr>
+        <p:cNvGrpSpPr/>
+        <p:nvPr/>
+      </p:nvGrpSpPr>
+      <p:grpSpPr>
+        <a:xfrm>
+          <a:off x="0" y="0"/>
+          <a:ext cx="0" cy="0"/>
+          <a:chOff x="0" y="0"/>
+          <a:chExt cx="0" cy="0"/>
+        </a:xfrm>
+      </p:grpSpPr>
+      <p:sp>
+        <p:nvSpPr>
+          <p:cNvPr id="2" name="Tytuł 1">
+            <a:extLst>
+              <a:ext uri="{FF2B5EF4-FFF2-40B4-BE49-F238E27FC236}">
+                <a16:creationId xmlns:a16="http://schemas.microsoft.com/office/drawing/2014/main" id="{F17CA7B5-4B11-2F0D-3238-F92434ED0FBC}"/>
+              </a:ext>
+            </a:extLst>
+          </p:cNvPr>
+          <p:cNvSpPr>
+            <a:spLocks noGrp="1"/>
+          </p:cNvSpPr>
+          <p:nvPr>
+            <p:ph type="title"/>
+          </p:nvPr>
+        </p:nvSpPr>
+        <p:spPr/>
+        <p:txBody>
+          <a:bodyPr/>
+          <a:lstStyle/>
+          <a:p>
+            <a:r>
+              <a:rPr lang="pl-PL" dirty="0" err="1"/>
+              <a:t>Adding</a:t>
+            </a:r>
+            <a:r>
+              <a:rPr lang="pl-PL" dirty="0"/>
+              <a:t> </a:t>
+            </a:r>
+            <a:r>
+              <a:rPr lang="pl-PL" dirty="0" err="1"/>
+              <a:t>numbers</a:t>
+            </a:r>
+            <a:endParaRPr lang="en-US" dirty="0"/>
+          </a:p>
+        </p:txBody>
+      </p:sp>
+      <p:sp>
+        <p:nvSpPr>
+          <p:cNvPr id="3" name="Symbol zastępczy zawartości 2">
+            <a:extLst>
+              <a:ext uri="{FF2B5EF4-FFF2-40B4-BE49-F238E27FC236}">
+                <a16:creationId xmlns:a16="http://schemas.microsoft.com/office/drawing/2014/main" id="{84328CA4-3BF7-53BA-2F28-7C71D1E91CF8}"/>
+              </a:ext>
+            </a:extLst>
+          </p:cNvPr>
+          <p:cNvSpPr>
+            <a:spLocks noGrp="1"/>
+          </p:cNvSpPr>
+          <p:nvPr>
+            <p:ph idx="1"/>
+          </p:nvPr>
+        </p:nvSpPr>
+        <p:spPr>
+          <a:xfrm>
+            <a:off x="1718993" y="2353469"/>
+            <a:ext cx="3354420" cy="1997301"/>
+          </a:xfrm>
+        </p:spPr>
+        <p:txBody>
+          <a:bodyPr>
+            <a:normAutofit fontScale="92500" lnSpcReduction="20000"/>
+          </a:bodyPr>
+          <a:lstStyle/>
+          <a:p>
+            <a:pPr marL="0" indent="0" latinLnBrk="1">
+              <a:buNone/>
+            </a:pPr>
+            <a:r>
+              <a:rPr lang="pl-PL" dirty="0"/>
+              <a:t>n = 4</a:t>
+            </a:r>
+          </a:p>
+          <a:p>
+            <a:pPr marL="0" indent="0" latinLnBrk="1">
+              <a:buNone/>
+            </a:pPr>
+            <a:r>
+              <a:rPr lang="pl-PL" dirty="0"/>
+              <a:t>m = 2</a:t>
+            </a:r>
+          </a:p>
+          <a:p>
+            <a:pPr marL="0" indent="0" latinLnBrk="1">
+              <a:buNone/>
+            </a:pPr>
+            <a:r>
+              <a:rPr lang="pl-PL" dirty="0"/>
+              <a:t>k = 0.0</a:t>
+            </a:r>
+          </a:p>
+          <a:p>
+            <a:pPr marL="0" indent="0" latinLnBrk="1">
+              <a:buNone/>
+            </a:pPr>
+            <a:r>
+              <a:rPr lang="pl-PL" dirty="0"/>
+              <a:t>rozmiar </a:t>
+            </a:r>
+            <a:r>
+              <a:rPr lang="pl-PL" dirty="0" err="1"/>
+              <a:t>ds</a:t>
+            </a:r>
+            <a:r>
+              <a:rPr lang="pl-PL" dirty="0"/>
+              <a:t> </a:t>
+            </a:r>
+            <a:r>
+              <a:rPr lang="pl-PL" dirty="0" err="1"/>
+              <a:t>train</a:t>
+            </a:r>
+            <a:r>
+              <a:rPr lang="pl-PL" dirty="0"/>
+              <a:t> =  16 </a:t>
+            </a:r>
+            <a:br>
+              <a:rPr lang="pl-PL" dirty="0"/>
+            </a:br>
+            <a:r>
+              <a:rPr lang="pl-PL" dirty="0"/>
+              <a:t>rozmiar </a:t>
+            </a:r>
+            <a:r>
+              <a:rPr lang="pl-PL" dirty="0" err="1"/>
+              <a:t>ds</a:t>
+            </a:r>
+            <a:r>
+              <a:rPr lang="pl-PL" dirty="0"/>
+              <a:t> test =  240</a:t>
+            </a:r>
+          </a:p>
+          <a:p>
+            <a:pPr marL="0" indent="0" latinLnBrk="1">
+              <a:buNone/>
+            </a:pPr>
+            <a:endParaRPr lang="pl-PL" dirty="0"/>
+          </a:p>
+        </p:txBody>
+      </p:sp>
+      <p:pic>
+        <p:nvPicPr>
+          <p:cNvPr id="5" name="Obraz 4">
+            <a:extLst>
+              <a:ext uri="{FF2B5EF4-FFF2-40B4-BE49-F238E27FC236}">
+                <a16:creationId xmlns:a16="http://schemas.microsoft.com/office/drawing/2014/main" id="{0FCC9F76-0A59-6ED4-7143-2CCBFD7E9A1D}"/>
+              </a:ext>
+            </a:extLst>
+          </p:cNvPr>
+          <p:cNvPicPr>
+            <a:picLocks noChangeAspect="1"/>
+          </p:cNvPicPr>
+          <p:nvPr/>
+        </p:nvPicPr>
+        <p:blipFill>
+          <a:blip r:embed="rId2"/>
+          <a:stretch>
+            <a:fillRect/>
+          </a:stretch>
+        </p:blipFill>
+        <p:spPr>
+          <a:xfrm>
+            <a:off x="5275885" y="492405"/>
+            <a:ext cx="6916115" cy="5172797"/>
+          </a:xfrm>
+          <a:prstGeom prst="rect">
+            <a:avLst/>
+          </a:prstGeom>
+        </p:spPr>
+      </p:pic>
+      <p:sp>
+        <p:nvSpPr>
+          <p:cNvPr id="7" name="pole tekstowe 6">
+            <a:extLst>
+              <a:ext uri="{FF2B5EF4-FFF2-40B4-BE49-F238E27FC236}">
+                <a16:creationId xmlns:a16="http://schemas.microsoft.com/office/drawing/2014/main" id="{F47321E0-ACED-9B72-4E89-905E08EFBE24}"/>
+              </a:ext>
+            </a:extLst>
+          </p:cNvPr>
+          <p:cNvSpPr txBox="1"/>
+          <p:nvPr/>
+        </p:nvSpPr>
+        <p:spPr>
+          <a:xfrm>
+            <a:off x="3262931" y="5792482"/>
+            <a:ext cx="8090869" cy="369332"/>
+          </a:xfrm>
+          <a:prstGeom prst="rect">
+            <a:avLst/>
+          </a:prstGeom>
+          <a:noFill/>
+        </p:spPr>
+        <p:txBody>
+          <a:bodyPr wrap="none" rtlCol="0">
+            <a:spAutoFit/>
+          </a:bodyPr>
+          <a:lstStyle/>
+          <a:p>
+            <a:r>
+              <a:rPr lang="pl-PL" dirty="0" err="1"/>
+              <a:t>When</a:t>
+            </a:r>
+            <a:r>
+              <a:rPr lang="pl-PL" dirty="0"/>
+              <a:t> </a:t>
+            </a:r>
+            <a:r>
+              <a:rPr lang="pl-PL" dirty="0" err="1"/>
+              <a:t>loss</a:t>
+            </a:r>
+            <a:r>
+              <a:rPr lang="pl-PL" dirty="0"/>
+              <a:t> ~0.3 NN </a:t>
+            </a:r>
+            <a:r>
+              <a:rPr lang="pl-PL" dirty="0" err="1"/>
+              <a:t>misses</a:t>
+            </a:r>
+            <a:r>
+              <a:rPr lang="pl-PL" dirty="0"/>
+              <a:t> 30% of </a:t>
+            </a:r>
+            <a:r>
+              <a:rPr lang="pl-PL" dirty="0" err="1"/>
+              <a:t>bits</a:t>
+            </a:r>
+            <a:r>
+              <a:rPr lang="pl-PL" dirty="0"/>
+              <a:t>, </a:t>
+            </a:r>
+            <a:r>
+              <a:rPr lang="pl-PL" dirty="0" err="1"/>
+              <a:t>spits</a:t>
+            </a:r>
+            <a:r>
+              <a:rPr lang="pl-PL" dirty="0"/>
+              <a:t> out </a:t>
+            </a:r>
+            <a:r>
+              <a:rPr lang="pl-PL" dirty="0" err="1"/>
+              <a:t>wrong</a:t>
+            </a:r>
+            <a:r>
+              <a:rPr lang="pl-PL" dirty="0"/>
+              <a:t> </a:t>
+            </a:r>
+            <a:r>
+              <a:rPr lang="pl-PL" dirty="0" err="1"/>
+              <a:t>number</a:t>
+            </a:r>
+            <a:r>
+              <a:rPr lang="pl-PL" dirty="0"/>
+              <a:t> most of the </a:t>
+            </a:r>
+            <a:r>
+              <a:rPr lang="pl-PL" dirty="0" err="1"/>
+              <a:t>time</a:t>
+            </a:r>
+            <a:endParaRPr lang="en-US" dirty="0"/>
+          </a:p>
+        </p:txBody>
+      </p:sp>
+    </p:spTree>
+    <p:extLst>
+      <p:ext uri="{BB962C8B-B14F-4D97-AF65-F5344CB8AC3E}">
+        <p14:creationId xmlns:p14="http://schemas.microsoft.com/office/powerpoint/2010/main" val="3516326354"/>
+      </p:ext>
+    </p:extLst>
+  </p:cSld>
+  <p:clrMapOvr>
+    <a:masterClrMapping/>
+  </p:clrMapOvr>
+</p:sld>
+</file>
+
+<file path=ppt/slides/slide8.xml><?xml version="1.0" encoding="utf-8"?>
+<p:sld xmlns:a="http://schemas.openxmlformats.org/drawingml/2006/main" xmlns:r="http://schemas.openxmlformats.org/officeDocument/2006/relationships" xmlns:p="http://schemas.openxmlformats.org/presentationml/2006/main">
+  <p:cSld>
+    <p:spTree>
+      <p:nvGrpSpPr>
+        <p:cNvPr id="1" name="">
+          <a:extLst>
+            <a:ext uri="{FF2B5EF4-FFF2-40B4-BE49-F238E27FC236}">
+              <a16:creationId xmlns:a16="http://schemas.microsoft.com/office/drawing/2014/main" id="{B9767AA2-8E6E-83A1-1EC6-08F0624FDEFE}"/>
+            </a:ext>
+          </a:extLst>
+        </p:cNvPr>
+        <p:cNvGrpSpPr/>
+        <p:nvPr/>
+      </p:nvGrpSpPr>
+      <p:grpSpPr>
+        <a:xfrm>
+          <a:off x="0" y="0"/>
+          <a:ext cx="0" cy="0"/>
+          <a:chOff x="0" y="0"/>
+          <a:chExt cx="0" cy="0"/>
+        </a:xfrm>
+      </p:grpSpPr>
+      <p:sp>
+        <p:nvSpPr>
+          <p:cNvPr id="2" name="Tytuł 1">
+            <a:extLst>
+              <a:ext uri="{FF2B5EF4-FFF2-40B4-BE49-F238E27FC236}">
+                <a16:creationId xmlns:a16="http://schemas.microsoft.com/office/drawing/2014/main" id="{59473D67-8D56-B978-9B32-DCC9587584AD}"/>
+              </a:ext>
+            </a:extLst>
+          </p:cNvPr>
+          <p:cNvSpPr>
+            <a:spLocks noGrp="1"/>
+          </p:cNvSpPr>
+          <p:nvPr>
+            <p:ph type="title"/>
+          </p:nvPr>
+        </p:nvSpPr>
+        <p:spPr/>
+        <p:txBody>
+          <a:bodyPr/>
+          <a:lstStyle/>
+          <a:p>
+            <a:r>
+              <a:rPr lang="pl-PL" dirty="0" err="1"/>
+              <a:t>Multiplication</a:t>
+            </a:r>
+            <a:r>
+              <a:rPr lang="pl-PL" dirty="0"/>
+              <a:t> by 2</a:t>
+            </a:r>
+            <a:endParaRPr lang="en-US" dirty="0"/>
+          </a:p>
+        </p:txBody>
+      </p:sp>
+      <p:sp>
+        <p:nvSpPr>
+          <p:cNvPr id="3" name="Symbol zastępczy zawartości 2">
+            <a:extLst>
+              <a:ext uri="{FF2B5EF4-FFF2-40B4-BE49-F238E27FC236}">
+                <a16:creationId xmlns:a16="http://schemas.microsoft.com/office/drawing/2014/main" id="{BA50DAC7-AD82-A6B0-4A41-131D44077281}"/>
+              </a:ext>
+            </a:extLst>
+          </p:cNvPr>
+          <p:cNvSpPr>
+            <a:spLocks noGrp="1"/>
+          </p:cNvSpPr>
+          <p:nvPr>
+            <p:ph idx="1"/>
+          </p:nvPr>
+        </p:nvSpPr>
+        <p:spPr>
+          <a:xfrm>
+            <a:off x="1718993" y="2353469"/>
+            <a:ext cx="3354420" cy="1997301"/>
+          </a:xfrm>
+        </p:spPr>
+        <p:txBody>
+          <a:bodyPr>
+            <a:normAutofit fontScale="92500" lnSpcReduction="20000"/>
+          </a:bodyPr>
+          <a:lstStyle/>
+          <a:p>
+            <a:pPr marL="0" indent="0" latinLnBrk="1">
+              <a:buNone/>
+            </a:pPr>
+            <a:r>
+              <a:rPr lang="pl-PL" dirty="0"/>
+              <a:t>n = 4</a:t>
+            </a:r>
+          </a:p>
+          <a:p>
+            <a:pPr marL="0" indent="0" latinLnBrk="1">
+              <a:buNone/>
+            </a:pPr>
+            <a:r>
+              <a:rPr lang="pl-PL" dirty="0"/>
+              <a:t>m = 2</a:t>
+            </a:r>
+          </a:p>
+          <a:p>
+            <a:pPr marL="0" indent="0" latinLnBrk="1">
+              <a:buNone/>
+            </a:pPr>
+            <a:r>
+              <a:rPr lang="pl-PL" dirty="0"/>
+              <a:t>k = 0.1</a:t>
+            </a:r>
+          </a:p>
+          <a:p>
+            <a:pPr marL="0" indent="0" latinLnBrk="1">
+              <a:buNone/>
+            </a:pPr>
+            <a:r>
+              <a:rPr lang="pl-PL" dirty="0"/>
+              <a:t>rozmiar </a:t>
+            </a:r>
+            <a:r>
+              <a:rPr lang="pl-PL" dirty="0" err="1"/>
+              <a:t>ds</a:t>
+            </a:r>
+            <a:r>
+              <a:rPr lang="pl-PL" dirty="0"/>
+              <a:t> </a:t>
+            </a:r>
+            <a:r>
+              <a:rPr lang="pl-PL" dirty="0" err="1"/>
+              <a:t>train</a:t>
+            </a:r>
+            <a:r>
+              <a:rPr lang="pl-PL" dirty="0"/>
+              <a:t> =  40 </a:t>
+            </a:r>
+            <a:br>
+              <a:rPr lang="pl-PL" dirty="0"/>
+            </a:br>
+            <a:r>
+              <a:rPr lang="pl-PL" dirty="0"/>
+              <a:t>rozmiar </a:t>
+            </a:r>
+            <a:r>
+              <a:rPr lang="pl-PL" dirty="0" err="1"/>
+              <a:t>ds</a:t>
+            </a:r>
+            <a:r>
+              <a:rPr lang="pl-PL" dirty="0"/>
+              <a:t> test =  216</a:t>
+            </a:r>
+          </a:p>
+          <a:p>
+            <a:pPr marL="0" indent="0" latinLnBrk="1">
+              <a:buNone/>
+            </a:pPr>
+            <a:endParaRPr lang="pl-PL" dirty="0"/>
+          </a:p>
+        </p:txBody>
+      </p:sp>
+      <p:sp>
+        <p:nvSpPr>
+          <p:cNvPr id="7" name="pole tekstowe 6">
+            <a:extLst>
+              <a:ext uri="{FF2B5EF4-FFF2-40B4-BE49-F238E27FC236}">
+                <a16:creationId xmlns:a16="http://schemas.microsoft.com/office/drawing/2014/main" id="{981EA272-1FD3-3B94-F824-64E0DF8DCC3A}"/>
+              </a:ext>
+            </a:extLst>
+          </p:cNvPr>
+          <p:cNvSpPr txBox="1"/>
+          <p:nvPr/>
+        </p:nvSpPr>
+        <p:spPr>
+          <a:xfrm>
+            <a:off x="3262931" y="5792482"/>
+            <a:ext cx="7798545" cy="369332"/>
+          </a:xfrm>
+          <a:prstGeom prst="rect">
+            <a:avLst/>
+          </a:prstGeom>
+          <a:noFill/>
+        </p:spPr>
+        <p:txBody>
+          <a:bodyPr wrap="none" rtlCol="0">
+            <a:spAutoFit/>
+          </a:bodyPr>
+          <a:lstStyle/>
+          <a:p>
+            <a:r>
+              <a:rPr lang="pl-PL" dirty="0"/>
+              <a:t>As </a:t>
+            </a:r>
+            <a:r>
+              <a:rPr lang="pl-PL" dirty="0" err="1"/>
+              <a:t>this</a:t>
+            </a:r>
+            <a:r>
+              <a:rPr lang="pl-PL" dirty="0"/>
+              <a:t> </a:t>
+            </a:r>
+            <a:r>
+              <a:rPr lang="pl-PL" dirty="0" err="1"/>
+              <a:t>is</a:t>
+            </a:r>
+            <a:r>
+              <a:rPr lang="pl-PL" dirty="0"/>
+              <a:t> </a:t>
+            </a:r>
+            <a:r>
+              <a:rPr lang="pl-PL" dirty="0" err="1"/>
+              <a:t>just</a:t>
+            </a:r>
+            <a:r>
+              <a:rPr lang="pl-PL" dirty="0"/>
+              <a:t> </a:t>
+            </a:r>
+            <a:r>
+              <a:rPr lang="pl-PL" dirty="0" err="1"/>
+              <a:t>bitshift</a:t>
+            </a:r>
+            <a:r>
+              <a:rPr lang="pl-PL" dirty="0"/>
+              <a:t>, NN </a:t>
+            </a:r>
+            <a:r>
+              <a:rPr lang="pl-PL" dirty="0" err="1"/>
+              <a:t>easly</a:t>
+            </a:r>
+            <a:r>
+              <a:rPr lang="pl-PL" dirty="0"/>
+              <a:t> </a:t>
+            </a:r>
+            <a:r>
+              <a:rPr lang="pl-PL" dirty="0" err="1"/>
+              <a:t>generalizes</a:t>
+            </a:r>
+            <a:r>
+              <a:rPr lang="pl-PL" dirty="0"/>
+              <a:t> </a:t>
+            </a:r>
+            <a:r>
+              <a:rPr lang="pl-PL" dirty="0" err="1"/>
+              <a:t>when</a:t>
+            </a:r>
+            <a:r>
+              <a:rPr lang="pl-PL" dirty="0"/>
+              <a:t> </a:t>
+            </a:r>
+            <a:r>
+              <a:rPr lang="pl-PL" dirty="0" err="1"/>
+              <a:t>gets</a:t>
+            </a:r>
+            <a:r>
+              <a:rPr lang="pl-PL" dirty="0"/>
+              <a:t> small </a:t>
+            </a:r>
+            <a:r>
+              <a:rPr lang="pl-PL" dirty="0" err="1"/>
+              <a:t>sample</a:t>
+            </a:r>
+            <a:r>
+              <a:rPr lang="pl-PL" dirty="0"/>
+              <a:t> of test </a:t>
+            </a:r>
+            <a:r>
+              <a:rPr lang="pl-PL" dirty="0" err="1"/>
+              <a:t>ds</a:t>
+            </a:r>
+            <a:endParaRPr lang="en-US" dirty="0"/>
+          </a:p>
+        </p:txBody>
+      </p:sp>
+      <p:pic>
+        <p:nvPicPr>
+          <p:cNvPr id="6" name="Obraz 5">
+            <a:extLst>
+              <a:ext uri="{FF2B5EF4-FFF2-40B4-BE49-F238E27FC236}">
+                <a16:creationId xmlns:a16="http://schemas.microsoft.com/office/drawing/2014/main" id="{739ACC54-BA27-3340-A177-0A406D0549AD}"/>
+              </a:ext>
+            </a:extLst>
+          </p:cNvPr>
+          <p:cNvPicPr>
+            <a:picLocks noChangeAspect="1"/>
+          </p:cNvPicPr>
+          <p:nvPr/>
+        </p:nvPicPr>
+        <p:blipFill>
+          <a:blip r:embed="rId2"/>
+          <a:stretch>
+            <a:fillRect/>
+          </a:stretch>
+        </p:blipFill>
+        <p:spPr>
+          <a:xfrm>
+            <a:off x="5323516" y="365125"/>
+            <a:ext cx="6868484" cy="5058481"/>
+          </a:xfrm>
+          <a:prstGeom prst="rect">
+            <a:avLst/>
+          </a:prstGeom>
+        </p:spPr>
+      </p:pic>
+    </p:spTree>
+    <p:extLst>
+      <p:ext uri="{BB962C8B-B14F-4D97-AF65-F5344CB8AC3E}">
+        <p14:creationId xmlns:p14="http://schemas.microsoft.com/office/powerpoint/2010/main" val="3603844734"/>
+      </p:ext>
+    </p:extLst>
+  </p:cSld>
+  <p:clrMapOvr>
+    <a:masterClrMapping/>
+  </p:clrMapOvr>
+</p:sld>
+</file>
+
+<file path=ppt/slides/slide9.xml><?xml version="1.0" encoding="utf-8"?>
+<p:sld xmlns:a="http://schemas.openxmlformats.org/drawingml/2006/main" xmlns:r="http://schemas.openxmlformats.org/officeDocument/2006/relationships" xmlns:p="http://schemas.openxmlformats.org/presentationml/2006/main">
+  <p:cSld>
+    <p:spTree>
+      <p:nvGrpSpPr>
+        <p:cNvPr id="1" name="">
+          <a:extLst>
+            <a:ext uri="{FF2B5EF4-FFF2-40B4-BE49-F238E27FC236}">
+              <a16:creationId xmlns:a16="http://schemas.microsoft.com/office/drawing/2014/main" id="{FEBE85AA-DC30-0115-C072-57FACCC5A3BF}"/>
+            </a:ext>
+          </a:extLst>
+        </p:cNvPr>
+        <p:cNvGrpSpPr/>
+        <p:nvPr/>
+      </p:nvGrpSpPr>
+      <p:grpSpPr>
+        <a:xfrm>
+          <a:off x="0" y="0"/>
+          <a:ext cx="0" cy="0"/>
+          <a:chOff x="0" y="0"/>
+          <a:chExt cx="0" cy="0"/>
+        </a:xfrm>
+      </p:grpSpPr>
+      <p:sp>
+        <p:nvSpPr>
+          <p:cNvPr id="2" name="Tytuł 1">
+            <a:extLst>
+              <a:ext uri="{FF2B5EF4-FFF2-40B4-BE49-F238E27FC236}">
+                <a16:creationId xmlns:a16="http://schemas.microsoft.com/office/drawing/2014/main" id="{57861346-F33A-521D-65BE-70EC13B35485}"/>
+              </a:ext>
+            </a:extLst>
+          </p:cNvPr>
+          <p:cNvSpPr>
+            <a:spLocks noGrp="1"/>
+          </p:cNvSpPr>
+          <p:nvPr>
+            <p:ph type="ctrTitle"/>
+          </p:nvPr>
+        </p:nvSpPr>
+        <p:spPr/>
+        <p:txBody>
+          <a:bodyPr>
+            <a:normAutofit fontScale="90000"/>
+          </a:bodyPr>
+          <a:lstStyle/>
+          <a:p>
+            <a:br>
+              <a:rPr lang="pl-PL" dirty="0"/>
+            </a:br>
+            <a:r>
+              <a:rPr lang="pl-PL" dirty="0"/>
+              <a:t>Ex2</a:t>
+            </a:r>
+            <a:br>
+              <a:rPr lang="pl-PL" dirty="0"/>
+            </a:br>
+            <a:r>
+              <a:rPr lang="pl-PL" dirty="0" err="1"/>
+              <a:t>Function</a:t>
+            </a:r>
+            <a:r>
+              <a:rPr lang="pl-PL" dirty="0"/>
+              <a:t> </a:t>
+            </a:r>
+            <a:r>
+              <a:rPr lang="pl-PL" dirty="0" err="1"/>
+              <a:t>approximation</a:t>
+            </a:r>
+            <a:r>
+              <a:rPr lang="pl-PL" dirty="0"/>
+              <a:t> and </a:t>
+            </a:r>
+            <a:r>
+              <a:rPr lang="pl-PL" dirty="0" err="1"/>
+              <a:t>expressivity</a:t>
+            </a:r>
+            <a:endParaRPr lang="en-US" dirty="0"/>
+          </a:p>
+        </p:txBody>
+      </p:sp>
+      <p:sp>
+        <p:nvSpPr>
+          <p:cNvPr id="3" name="Podtytuł 2">
+            <a:extLst>
+              <a:ext uri="{FF2B5EF4-FFF2-40B4-BE49-F238E27FC236}">
+                <a16:creationId xmlns:a16="http://schemas.microsoft.com/office/drawing/2014/main" id="{ECC45C4B-3F98-91C8-7EA0-A1AFFFF45176}"/>
+              </a:ext>
+            </a:extLst>
+          </p:cNvPr>
+          <p:cNvSpPr>
+            <a:spLocks noGrp="1"/>
+          </p:cNvSpPr>
+          <p:nvPr>
+            <p:ph type="subTitle" idx="1"/>
+          </p:nvPr>
+        </p:nvSpPr>
+        <p:spPr/>
+        <p:txBody>
+          <a:bodyPr/>
+          <a:lstStyle/>
+          <a:p>
+            <a:endParaRPr lang="en-US"/>
+          </a:p>
+        </p:txBody>
+      </p:sp>
+    </p:spTree>
+    <p:extLst>
+      <p:ext uri="{BB962C8B-B14F-4D97-AF65-F5344CB8AC3E}">
+        <p14:creationId xmlns:p14="http://schemas.microsoft.com/office/powerpoint/2010/main" val="2608444099"/>
       </p:ext>
     </p:extLst>
   </p:cSld>
